--- a/Projet python d’un dab.pptx
+++ b/Projet python d’un dab.pptx
@@ -3676,8 +3676,13 @@
           <a:p>
             <a:r>
               <a:rPr lang="fr-FR" dirty="0"/>
-              <a:t>La fonction principale du Distributeur Automatique à Billet est en premier lieu de pouvoir transférer, retirer ou déposer de l’argent à volonté (dans la limite de vos fonds) tout en gardant une bonne sécurité de votre compte en banque.</a:t>
-            </a:r>
+              <a:t>La fonction principale du Distributeur Automatique à Billet est en premier lieu de pouvoir transférer, retirer ou déposer de l’argent à volonté (dans la limite de vos fonds) tout en gardant une bonne sécurité de votre compte en banque. L’avantage d’utiliser un DAB est qu’il est disponible et utilisable 24/24H, étant donné que c’est un programme, et cela nous permet d’éviter d’aller au guichet pour faire </a:t>
+            </a:r>
+            <a:r>
+              <a:rPr lang="fr-FR"/>
+              <a:t>certaines actions.</a:t>
+            </a:r>
+            <a:endParaRPr lang="fr-FR" dirty="0"/>
           </a:p>
         </p:txBody>
       </p:sp>
